--- a/DBTUNING/Day03_조인_서브쿼리_집합_정렬/SQL튜닝_Ch08_교안.pptx
+++ b/DBTUNING/Day03_조인_서브쿼리_집합_정렬/SQL튜닝_Ch08_교안.pptx
@@ -10389,7 +10389,7 @@
                 </a:solidFill>
                 <a:latin typeface="Consolas"/>
               </a:rPr>
-              <a:t>| 0  | SELECT STATEMENT            |                |      1 |        |  15029 |00:00:00.09 |    4081 |</a:t>
+              <a:t>| 0  | SELECT STATEMENT            |                |      1 |        |  15029 |00:00:00.02 |    4081 |</a:t>
             </a:r>
           </a:p>
           <a:p>
@@ -10422,7 +10422,7 @@
                 </a:solidFill>
                 <a:latin typeface="Consolas"/>
               </a:rPr>
-              <a:t>| 3  |  TABLE ACCESS FULL          | MEDICAL_CLAIMS |      1 |  14397 |  15029 |00:00:00.09 |    4081 |</a:t>
+              <a:t>| 3  |  TABLE ACCESS FULL          | MEDICAL_CLAIMS |      1 |  15283 |  15029 |00:00:00.02 |    4081 |</a:t>
             </a:r>
           </a:p>
           <a:p>
@@ -10637,7 +10637,7 @@
                 </a:solidFill>
                 <a:latin typeface="Malgun Gothic"/>
               </a:rPr>
-              <a:t>    –  E-Rows 14397 — 옵티마이저의 추정치로 실제와 큰 차이는 없다</a:t>
+              <a:t>    –  E-Rows 15283 — 옵티마이저의 추정치로 실제와 큰 차이는 없다</a:t>
             </a:r>
           </a:p>
           <a:p>
@@ -10952,7 +10952,7 @@
                 </a:solidFill>
                 <a:latin typeface="Consolas"/>
               </a:rPr>
-              <a:t>| 1  |  HASH JOIN                           |                |      1 |     72 |  15029 |00:00:00.02 |    4083 |</a:t>
+              <a:t>| 1  |  HASH JOIN                           |                |      1 |     76 |  15029 |00:00:00.01 |    4083 |</a:t>
             </a:r>
           </a:p>
           <a:p>
@@ -10985,7 +10985,7 @@
                 </a:solidFill>
                 <a:latin typeface="Consolas"/>
               </a:rPr>
-              <a:t>| 4  |   TABLE ACCESS FULL                  | MEDICAL_CLAIMS |      1 |  14397 |  15029 |00:00:00.02 |    4080 |</a:t>
+              <a:t>| 4  |   TABLE ACCESS FULL                  | MEDICAL_CLAIMS |      1 |  15283 |  15029 |00:00:00.01 |    4080 |</a:t>
             </a:r>
           </a:p>
           <a:p>
@@ -11989,7 +11989,7 @@
                 </a:solidFill>
                 <a:latin typeface="Malgun Gothic"/>
               </a:rPr>
-              <a:t>•  Buffers 6,609이 나온 이유</a:t>
+              <a:t>•  Buffers 6,612가 나온 이유</a:t>
             </a:r>
           </a:p>
         </p:txBody>
@@ -12983,7 +12983,7 @@
                 </a:solidFill>
                 <a:latin typeface="Consolas"/>
               </a:rPr>
-              <a:t>| 0  | SELECT STATEMENT     |                |      1 |        |   6462 |00:00:00.03 |    6609 |</a:t>
+              <a:t>| 0  | SELECT STATEMENT     |                |      1 |        |   6462 |00:00:00.03 |    6612 |</a:t>
             </a:r>
           </a:p>
           <a:p>
@@ -12994,7 +12994,7 @@
                 </a:solidFill>
                 <a:latin typeface="Consolas"/>
               </a:rPr>
-              <a:t>| 1  |  HASH JOIN           |                |      1 |   6922 |   6462 |00:00:00.03 |    6609 |</a:t>
+              <a:t>| 1  |  HASH JOIN           |                |      1 |   7951 |   6462 |00:00:00.03 |    6612 |</a:t>
             </a:r>
           </a:p>
           <a:p>
@@ -13005,7 +13005,7 @@
                 </a:solidFill>
                 <a:latin typeface="Consolas"/>
               </a:rPr>
-              <a:t>| 2  |   VIEW               | VW_SQ_1        |      1 |     48 |      5 |00:00:00.01 |    3090 |</a:t>
+              <a:t>| 2  |   VIEW               | VW_SQ_1        |      1 |     50 |      5 |00:00:00.02 |    3090 |</a:t>
             </a:r>
           </a:p>
           <a:p>
@@ -13016,7 +13016,7 @@
                 </a:solidFill>
                 <a:latin typeface="Consolas"/>
               </a:rPr>
-              <a:t>| 3  |    HASH GROUP BY     |                |      1 |     48 |      5 |00:00:00.01 |    3090 |</a:t>
+              <a:t>| 3  |    HASH GROUP BY     |                |      1 |     50 |      5 |00:00:00.02 |    3090 |</a:t>
             </a:r>
           </a:p>
           <a:p>
@@ -13027,7 +13027,7 @@
                 </a:solidFill>
                 <a:latin typeface="Consolas"/>
               </a:rPr>
-              <a:t>| 4  |     TABLE ACCESS FULL| MEDICAL_CLAIMS |      1 |  14397 |  15029 |00:00:00.01 |    3090 |</a:t>
+              <a:t>| 4  |     TABLE ACCESS FULL| MEDICAL_CLAIMS |      1 |  15283 |  15029 |00:00:00.01 |    3090 |</a:t>
             </a:r>
           </a:p>
           <a:p>
@@ -13038,7 +13038,7 @@
                 </a:solidFill>
                 <a:latin typeface="Consolas"/>
               </a:rPr>
-              <a:t>| 5  |   TABLE ACCESS FULL  | MEDICAL_CLAIMS |      1 |  14397 |  15029 |00:00:00.01 |    3518 |</a:t>
+              <a:t>| 5  |   TABLE ACCESS FULL  | MEDICAL_CLAIMS |      1 |  15283 |  15029 |00:00:00.01 |    3518 |</a:t>
             </a:r>
           </a:p>
           <a:p>
@@ -13682,7 +13682,7 @@
                 </a:solidFill>
                 <a:latin typeface="Malgun Gothic"/>
               </a:rPr>
-              <a:t>Buffers 6,609의 분해</a:t>
+              <a:t>Buffers 6,612의 분해</a:t>
             </a:r>
           </a:p>
         </p:txBody>
@@ -13716,7 +13716,7 @@
                 </a:solidFill>
                 <a:latin typeface="Malgun Gothic"/>
               </a:rPr>
-              <a:t>•  실측된 전체 Buffers는 6,609다</a:t>
+              <a:t>•  실측된 전체 Buffers는 6,612다</a:t>
             </a:r>
           </a:p>
           <a:p>
@@ -13749,7 +13749,7 @@
                 </a:solidFill>
                 <a:latin typeface="Malgun Gothic"/>
               </a:rPr>
-              <a:t>    –  두 값을 더하면 약 6,608로 실측 6,609와 거의 일치한다</a:t>
+              <a:t>    –  두 값을 더하면 약 6,608로 실측 6,612와 거의 일치한다</a:t>
             </a:r>
           </a:p>
           <a:p>
@@ -13782,7 +13782,7 @@
                 </a:solidFill>
                 <a:latin typeface="Malgun Gothic"/>
               </a:rPr>
-              <a:t>    –  Q3 6,609 — 원본을 두 번 읽는 구조라 그만큼 커졌다</a:t>
+              <a:t>    –  Q3 6,612 — 원본을 두 번 읽는 구조라 그만큼 커졌다</a:t>
             </a:r>
           </a:p>
           <a:p>
@@ -16500,7 +16500,7 @@
                 </a:solidFill>
                 <a:latin typeface="Consolas"/>
               </a:rPr>
-              <a:t>| 그룹 평균과 비교   | 상관 서브쿼리    | (JOIN 미측정)  |     6,609 |         - |</a:t>
+              <a:t>| 그룹 평균과 비교   | 상관 서브쿼리    | (JOIN 미측정)  |     6,612 |         - |</a:t>
             </a:r>
           </a:p>
           <a:p>
@@ -17492,7 +17492,7 @@
                 </a:solidFill>
                 <a:latin typeface="Malgun Gothic"/>
               </a:rPr>
-              <a:t>    –  4~5번  두 번의 Full Scan이 하는 일과 Buffers 6,609의 근거</a:t>
+              <a:t>    –  4~5번  두 번의 Full Scan이 하는 일과 Buffers 6,612의 근거</a:t>
             </a:r>
           </a:p>
           <a:p>
